--- a/presentacion/Cursor_Presentacion_EN.pptx
+++ b/presentacion/Cursor_Presentacion_EN.pptx
@@ -34763,7 +34763,7 @@
                 </a:solidFill>
                 <a:latin typeface="Segoe UI"/>
               </a:rPr>
-              <a:t>Dry-run by default; --delete opt-in (don't delete a teammate's work)</a:t>
+              <a:t>Dry-run by default; guard BOTH directions (you clobber without --delete too)</a:t>
             </a:r>
           </a:p>
           <a:p>
